--- a/template_presentation.pptx
+++ b/template_presentation.pptx
@@ -11,6 +11,8 @@
     <p:sldId id="259" r:id="rId10"/>
     <p:sldId id="260" r:id="rId11"/>
     <p:sldId id="261" r:id="rId12"/>
+    <p:sldId id="262" r:id="rId13"/>
+    <p:sldId id="263" r:id="rId14"/>
   </p:sldIdLst>
   <p:sldSz cx="9144000" cy="6858000" type="screen4x3"/>
   <p:notesSz cx="6858000" cy="9144000"/>
@@ -3091,10 +3093,10 @@
         <a:gradFill rotWithShape="1">
           <a:gsLst>
             <a:gs pos="0">
-              <a:srgbClr val="0F0C29"/>
+              <a:srgbClr val="FFFFFF"/>
             </a:gs>
             <a:gs pos="100000">
-              <a:srgbClr val="302B63"/>
+              <a:srgbClr val="F0F0F0"/>
             </a:gs>
           </a:gsLst>
           <a:lin scaled="0"/>
@@ -3117,14 +3119,14 @@
         </p:nvSpPr>
         <p:spPr>
           <a:xfrm>
-            <a:off x="7772400" y="-914400"/>
-            <a:ext cx="2743200" cy="2743200"/>
+            <a:off x="7498079" y="-1097280"/>
+            <a:ext cx="3200400" cy="3200400"/>
           </a:xfrm>
           <a:prstGeom prst="ellipse">
             <a:avLst/>
           </a:prstGeom>
           <a:solidFill>
-            <a:srgbClr val="0F8B8D"/>
+            <a:srgbClr val="2D2D2D"/>
           </a:solidFill>
           <a:ln>
             <a:noFill/>
@@ -3160,14 +3162,14 @@
         </p:nvSpPr>
         <p:spPr>
           <a:xfrm>
-            <a:off x="-457200" y="5029200"/>
-            <a:ext cx="1828800" cy="1828800"/>
+            <a:off x="-914400" y="5303520"/>
+            <a:ext cx="2011680" cy="2011680"/>
           </a:xfrm>
           <a:prstGeom prst="ellipse">
             <a:avLst/>
           </a:prstGeom>
           <a:solidFill>
-            <a:srgbClr val="53CED1"/>
+            <a:srgbClr val="5A5A5A"/>
           </a:solidFill>
           <a:ln>
             <a:noFill/>
@@ -3203,14 +3205,14 @@
         </p:nvSpPr>
         <p:spPr>
           <a:xfrm>
-            <a:off x="1371600" y="2560320"/>
-            <a:ext cx="1828800" cy="50800"/>
+            <a:off x="1097280" y="2377440"/>
+            <a:ext cx="2286000" cy="50800"/>
           </a:xfrm>
           <a:prstGeom prst="rect">
             <a:avLst/>
           </a:prstGeom>
           <a:solidFill>
-            <a:srgbClr val="0F8B8D"/>
+            <a:srgbClr val="2D2D2D"/>
           </a:solidFill>
           <a:ln>
             <a:noFill/>
@@ -3246,8 +3248,8 @@
         </p:nvSpPr>
         <p:spPr>
           <a:xfrm>
-            <a:off x="1371600" y="2743200"/>
-            <a:ext cx="6400800" cy="1371600"/>
+            <a:off x="1097280" y="365760"/>
+            <a:ext cx="6858000" cy="548640"/>
           </a:xfrm>
           <a:prstGeom prst="rect">
             <a:avLst/>
@@ -3260,15 +3262,16 @@
           </a:bodyPr>
           <a:lstStyle/>
           <a:p>
-            <a:pPr>
-              <a:defRPr sz="4000" b="1">
+            <a:pPr algn="l">
+              <a:defRPr sz="1000" b="0" i="0">
                 <a:solidFill>
-                  <a:srgbClr val="FFFFFF"/>
+                  <a:srgbClr val="7A7A7A"/>
                 </a:solidFill>
+                <a:latin typeface="Open Sans"/>
               </a:defRPr>
             </a:pPr>
             <a:r>
-              <a:t>НАЗВАНИЕ ПРЕЗЕНТАЦИИ</a:t>
+              <a:t>Тверской филиал РГУ им. А.Н. Косыгина</a:t>
             </a:r>
           </a:p>
         </p:txBody>
@@ -3281,8 +3284,8 @@
         </p:nvSpPr>
         <p:spPr>
           <a:xfrm>
-            <a:off x="1371600" y="4114800"/>
-            <a:ext cx="6400800" cy="914400"/>
+            <a:off x="1097280" y="2651760"/>
+            <a:ext cx="6858000" cy="1645920"/>
           </a:xfrm>
           <a:prstGeom prst="rect">
             <a:avLst/>
@@ -3295,15 +3298,16 @@
           </a:bodyPr>
           <a:lstStyle/>
           <a:p>
-            <a:pPr>
-              <a:defRPr sz="1800">
+            <a:pPr algn="l">
+              <a:defRPr sz="3400" b="1" i="0">
                 <a:solidFill>
-                  <a:srgbClr val="E8E8E8"/>
+                  <a:srgbClr val="1A1A1A"/>
                 </a:solidFill>
+                <a:latin typeface="Montserrat"/>
               </a:defRPr>
             </a:pPr>
             <a:r>
-              <a:t>Подзаголовок или краткое описание темы</a:t>
+              <a:t>ШАБЛОН ПРЕЗЕНТАЦИИ</a:t>
             </a:r>
           </a:p>
         </p:txBody>
@@ -3316,8 +3320,8 @@
         </p:nvSpPr>
         <p:spPr>
           <a:xfrm>
-            <a:off x="1371600" y="5669280"/>
-            <a:ext cx="6400800" cy="731520"/>
+            <a:off x="1097280" y="5760720"/>
+            <a:ext cx="6858000" cy="548640"/>
           </a:xfrm>
           <a:prstGeom prst="rect">
             <a:avLst/>
@@ -3330,15 +3334,16 @@
           </a:bodyPr>
           <a:lstStyle/>
           <a:p>
-            <a:pPr>
-              <a:defRPr sz="1200">
+            <a:pPr algn="l">
+              <a:defRPr sz="1100" b="0" i="0">
                 <a:solidFill>
-                  <a:srgbClr val="6C757D"/>
+                  <a:srgbClr val="7A7A7A"/>
                 </a:solidFill>
+                <a:latin typeface="Open Sans"/>
               </a:defRPr>
             </a:pPr>
             <a:r>
-              <a:t>Автор: Имя Фамилия  |  Группа: XX-XXX  |  2026</a:t>
+              <a:t>Студент  •  Группа XX-XXX  •  2026</a:t>
             </a:r>
           </a:p>
         </p:txBody>
@@ -3356,13 +3361,1147 @@
   <p:cSld>
     <p:bg>
       <p:bgPr>
+        <a:solidFill>
+          <a:srgbClr val="FFFFFF"/>
+        </a:solidFill>
+        <a:effectLst/>
+      </p:bgPr>
+    </p:bg>
+    <p:spTree>
+      <p:nvGrpSpPr>
+        <p:cNvPr id="1" name=""/>
+        <p:cNvGrpSpPr/>
+        <p:nvPr/>
+      </p:nvGrpSpPr>
+      <p:grpSpPr/>
+      <p:sp>
+        <p:nvSpPr>
+          <p:cNvPr id="2" name="TextBox 1"/>
+          <p:cNvSpPr txBox="1"/>
+          <p:nvPr/>
+        </p:nvSpPr>
+        <p:spPr>
+          <a:xfrm>
+            <a:off x="731520" y="365760"/>
+            <a:ext cx="7680960" cy="822960"/>
+          </a:xfrm>
+          <a:prstGeom prst="rect">
+            <a:avLst/>
+          </a:prstGeom>
+          <a:noFill/>
+        </p:spPr>
+        <p:txBody>
+          <a:bodyPr wrap="square">
+            <a:spAutoFit/>
+          </a:bodyPr>
+          <a:lstStyle/>
+          <a:p>
+            <a:pPr algn="l">
+              <a:defRPr sz="2800" b="1" i="0">
+                <a:solidFill>
+                  <a:srgbClr val="1A1A1A"/>
+                </a:solidFill>
+                <a:latin typeface="Montserrat"/>
+              </a:defRPr>
+            </a:pPr>
+            <a:r>
+              <a:t>СОДЕРЖАНИЕ</a:t>
+            </a:r>
+          </a:p>
+        </p:txBody>
+      </p:sp>
+      <p:sp>
+        <p:nvSpPr>
+          <p:cNvPr id="3" name="Rectangle 2"/>
+          <p:cNvSpPr/>
+          <p:nvPr/>
+        </p:nvSpPr>
+        <p:spPr>
+          <a:xfrm>
+            <a:off x="731520" y="1097280"/>
+            <a:ext cx="1645920" cy="38100"/>
+          </a:xfrm>
+          <a:prstGeom prst="rect">
+            <a:avLst/>
+          </a:prstGeom>
+          <a:solidFill>
+            <a:srgbClr val="2D2D2D"/>
+          </a:solidFill>
+          <a:ln>
+            <a:noFill/>
+          </a:ln>
+        </p:spPr>
+        <p:style>
+          <a:lnRef idx="1">
+            <a:schemeClr val="accent1"/>
+          </a:lnRef>
+          <a:fillRef idx="3">
+            <a:schemeClr val="accent1"/>
+          </a:fillRef>
+          <a:effectRef idx="2">
+            <a:schemeClr val="accent1"/>
+          </a:effectRef>
+          <a:fontRef idx="minor">
+            <a:schemeClr val="lt1"/>
+          </a:fontRef>
+        </p:style>
+        <p:txBody>
+          <a:bodyPr rtlCol="0" anchor="ctr"/>
+          <a:lstStyle/>
+          <a:p>
+            <a:pPr algn="ctr"/>
+          </a:p>
+        </p:txBody>
+      </p:sp>
+      <p:sp>
+        <p:nvSpPr>
+          <p:cNvPr id="4" name="TextBox 3"/>
+          <p:cNvSpPr txBox="1"/>
+          <p:nvPr/>
+        </p:nvSpPr>
+        <p:spPr>
+          <a:xfrm>
+            <a:off x="731520" y="1645920"/>
+            <a:ext cx="7315200" cy="548640"/>
+          </a:xfrm>
+          <a:prstGeom prst="rect">
+            <a:avLst/>
+          </a:prstGeom>
+          <a:noFill/>
+        </p:spPr>
+        <p:txBody>
+          <a:bodyPr wrap="square">
+            <a:spAutoFit/>
+          </a:bodyPr>
+          <a:lstStyle/>
+          <a:p>
+            <a:pPr algn="l">
+              <a:defRPr sz="1800" b="0" i="0">
+                <a:solidFill>
+                  <a:srgbClr val="3A3A3A"/>
+                </a:solidFill>
+                <a:latin typeface="Open Sans"/>
+              </a:defRPr>
+            </a:pPr>
+            <a:r>
+              <a:t>01  Введение и актуальность</a:t>
+            </a:r>
+          </a:p>
+        </p:txBody>
+      </p:sp>
+      <p:sp>
+        <p:nvSpPr>
+          <p:cNvPr id="5" name="TextBox 4"/>
+          <p:cNvSpPr txBox="1"/>
+          <p:nvPr/>
+        </p:nvSpPr>
+        <p:spPr>
+          <a:xfrm>
+            <a:off x="731520" y="2468880"/>
+            <a:ext cx="7315200" cy="548640"/>
+          </a:xfrm>
+          <a:prstGeom prst="rect">
+            <a:avLst/>
+          </a:prstGeom>
+          <a:noFill/>
+        </p:spPr>
+        <p:txBody>
+          <a:bodyPr wrap="square">
+            <a:spAutoFit/>
+          </a:bodyPr>
+          <a:lstStyle/>
+          <a:p>
+            <a:pPr algn="l">
+              <a:defRPr sz="1800" b="0" i="0">
+                <a:solidFill>
+                  <a:srgbClr val="3A3A3A"/>
+                </a:solidFill>
+                <a:latin typeface="Open Sans"/>
+              </a:defRPr>
+            </a:pPr>
+            <a:r>
+              <a:t>02  Основная часть</a:t>
+            </a:r>
+          </a:p>
+        </p:txBody>
+      </p:sp>
+      <p:sp>
+        <p:nvSpPr>
+          <p:cNvPr id="6" name="TextBox 5"/>
+          <p:cNvSpPr txBox="1"/>
+          <p:nvPr/>
+        </p:nvSpPr>
+        <p:spPr>
+          <a:xfrm>
+            <a:off x="731520" y="3291840"/>
+            <a:ext cx="7315200" cy="548640"/>
+          </a:xfrm>
+          <a:prstGeom prst="rect">
+            <a:avLst/>
+          </a:prstGeom>
+          <a:noFill/>
+        </p:spPr>
+        <p:txBody>
+          <a:bodyPr wrap="square">
+            <a:spAutoFit/>
+          </a:bodyPr>
+          <a:lstStyle/>
+          <a:p>
+            <a:pPr algn="l">
+              <a:defRPr sz="1800" b="0" i="0">
+                <a:solidFill>
+                  <a:srgbClr val="3A3A3A"/>
+                </a:solidFill>
+                <a:latin typeface="Open Sans"/>
+              </a:defRPr>
+            </a:pPr>
+            <a:r>
+              <a:t>03  Анализ и результаты</a:t>
+            </a:r>
+          </a:p>
+        </p:txBody>
+      </p:sp>
+      <p:sp>
+        <p:nvSpPr>
+          <p:cNvPr id="7" name="TextBox 6"/>
+          <p:cNvSpPr txBox="1"/>
+          <p:nvPr/>
+        </p:nvSpPr>
+        <p:spPr>
+          <a:xfrm>
+            <a:off x="731520" y="4114800"/>
+            <a:ext cx="7315200" cy="548640"/>
+          </a:xfrm>
+          <a:prstGeom prst="rect">
+            <a:avLst/>
+          </a:prstGeom>
+          <a:noFill/>
+        </p:spPr>
+        <p:txBody>
+          <a:bodyPr wrap="square">
+            <a:spAutoFit/>
+          </a:bodyPr>
+          <a:lstStyle/>
+          <a:p>
+            <a:pPr algn="l">
+              <a:defRPr sz="1800" b="0" i="0">
+                <a:solidFill>
+                  <a:srgbClr val="3A3A3A"/>
+                </a:solidFill>
+                <a:latin typeface="Open Sans"/>
+              </a:defRPr>
+            </a:pPr>
+            <a:r>
+              <a:t>04  Выводы</a:t>
+            </a:r>
+          </a:p>
+        </p:txBody>
+      </p:sp>
+    </p:spTree>
+  </p:cSld>
+  <p:clrMapOvr>
+    <a:masterClrMapping/>
+  </p:clrMapOvr>
+</p:sld>
+</file>
+
+<file path=ppt/slides/slide3.xml><?xml version="1.0" encoding="utf-8"?>
+<p:sld xmlns:a="http://schemas.openxmlformats.org/drawingml/2006/main" xmlns:p="http://schemas.openxmlformats.org/presentationml/2006/main" xmlns:r="http://schemas.openxmlformats.org/officeDocument/2006/relationships">
+  <p:cSld>
+    <p:bg>
+      <p:bgPr>
+        <a:solidFill>
+          <a:srgbClr val="FFFFFF"/>
+        </a:solidFill>
+        <a:effectLst/>
+      </p:bgPr>
+    </p:bg>
+    <p:spTree>
+      <p:nvGrpSpPr>
+        <p:cNvPr id="1" name=""/>
+        <p:cNvGrpSpPr/>
+        <p:nvPr/>
+      </p:nvGrpSpPr>
+      <p:grpSpPr/>
+      <p:sp>
+        <p:nvSpPr>
+          <p:cNvPr id="2" name="TextBox 1"/>
+          <p:cNvSpPr txBox="1"/>
+          <p:nvPr/>
+        </p:nvSpPr>
+        <p:spPr>
+          <a:xfrm>
+            <a:off x="731520" y="274320"/>
+            <a:ext cx="7680960" cy="822960"/>
+          </a:xfrm>
+          <a:prstGeom prst="rect">
+            <a:avLst/>
+          </a:prstGeom>
+          <a:noFill/>
+        </p:spPr>
+        <p:txBody>
+          <a:bodyPr wrap="square">
+            <a:spAutoFit/>
+          </a:bodyPr>
+          <a:lstStyle/>
+          <a:p>
+            <a:pPr algn="l">
+              <a:defRPr sz="2600" b="1" i="0">
+                <a:solidFill>
+                  <a:srgbClr val="1A1A1A"/>
+                </a:solidFill>
+                <a:latin typeface="Montserrat"/>
+              </a:defRPr>
+            </a:pPr>
+            <a:r>
+              <a:t>Заголовок слайда 3</a:t>
+            </a:r>
+          </a:p>
+        </p:txBody>
+      </p:sp>
+      <p:sp>
+        <p:nvSpPr>
+          <p:cNvPr id="3" name="Rectangle 2"/>
+          <p:cNvSpPr/>
+          <p:nvPr/>
+        </p:nvSpPr>
+        <p:spPr>
+          <a:xfrm>
+            <a:off x="731520" y="1005840"/>
+            <a:ext cx="1371600" cy="38100"/>
+          </a:xfrm>
+          <a:prstGeom prst="rect">
+            <a:avLst/>
+          </a:prstGeom>
+          <a:solidFill>
+            <a:srgbClr val="2D2D2D"/>
+          </a:solidFill>
+          <a:ln>
+            <a:noFill/>
+          </a:ln>
+        </p:spPr>
+        <p:style>
+          <a:lnRef idx="1">
+            <a:schemeClr val="accent1"/>
+          </a:lnRef>
+          <a:fillRef idx="3">
+            <a:schemeClr val="accent1"/>
+          </a:fillRef>
+          <a:effectRef idx="2">
+            <a:schemeClr val="accent1"/>
+          </a:effectRef>
+          <a:fontRef idx="minor">
+            <a:schemeClr val="lt1"/>
+          </a:fontRef>
+        </p:style>
+        <p:txBody>
+          <a:bodyPr rtlCol="0" anchor="ctr"/>
+          <a:lstStyle/>
+          <a:p>
+            <a:pPr algn="ctr"/>
+          </a:p>
+        </p:txBody>
+      </p:sp>
+      <p:sp>
+        <p:nvSpPr>
+          <p:cNvPr id="4" name="TextBox 3"/>
+          <p:cNvSpPr txBox="1"/>
+          <p:nvPr/>
+        </p:nvSpPr>
+        <p:spPr>
+          <a:xfrm>
+            <a:off x="731520" y="1371600"/>
+            <a:ext cx="7680960" cy="5029200"/>
+          </a:xfrm>
+          <a:prstGeom prst="rect">
+            <a:avLst/>
+          </a:prstGeom>
+          <a:noFill/>
+        </p:spPr>
+        <p:txBody>
+          <a:bodyPr wrap="square">
+            <a:spAutoFit/>
+          </a:bodyPr>
+          <a:lstStyle/>
+          <a:p>
+            <a:pPr>
+              <a:defRPr sz="1600">
+                <a:solidFill>
+                  <a:srgbClr val="3A3A3A"/>
+                </a:solidFill>
+                <a:latin typeface="Open Sans"/>
+              </a:defRPr>
+            </a:pPr>
+            <a:r>
+              <a:t>[Здесь размещается контент слайда]</a:t>
+            </a:r>
+          </a:p>
+        </p:txBody>
+      </p:sp>
+      <p:sp>
+        <p:nvSpPr>
+          <p:cNvPr id="5" name="TextBox 4"/>
+          <p:cNvSpPr txBox="1"/>
+          <p:nvPr/>
+        </p:nvSpPr>
+        <p:spPr>
+          <a:xfrm>
+            <a:off x="8229600" y="6400800"/>
+            <a:ext cx="731520" cy="365760"/>
+          </a:xfrm>
+          <a:prstGeom prst="rect">
+            <a:avLst/>
+          </a:prstGeom>
+          <a:noFill/>
+        </p:spPr>
+        <p:txBody>
+          <a:bodyPr wrap="square">
+            <a:spAutoFit/>
+          </a:bodyPr>
+          <a:lstStyle/>
+          <a:p>
+            <a:pPr algn="r">
+              <a:defRPr sz="1000" b="0" i="0">
+                <a:solidFill>
+                  <a:srgbClr val="7A7A7A"/>
+                </a:solidFill>
+                <a:latin typeface="Open Sans"/>
+              </a:defRPr>
+            </a:pPr>
+            <a:r>
+              <a:t>3</a:t>
+            </a:r>
+          </a:p>
+        </p:txBody>
+      </p:sp>
+    </p:spTree>
+  </p:cSld>
+  <p:clrMapOvr>
+    <a:masterClrMapping/>
+  </p:clrMapOvr>
+</p:sld>
+</file>
+
+<file path=ppt/slides/slide4.xml><?xml version="1.0" encoding="utf-8"?>
+<p:sld xmlns:a="http://schemas.openxmlformats.org/drawingml/2006/main" xmlns:p="http://schemas.openxmlformats.org/presentationml/2006/main" xmlns:r="http://schemas.openxmlformats.org/officeDocument/2006/relationships">
+  <p:cSld>
+    <p:bg>
+      <p:bgPr>
+        <a:solidFill>
+          <a:srgbClr val="FFFFFF"/>
+        </a:solidFill>
+        <a:effectLst/>
+      </p:bgPr>
+    </p:bg>
+    <p:spTree>
+      <p:nvGrpSpPr>
+        <p:cNvPr id="1" name=""/>
+        <p:cNvGrpSpPr/>
+        <p:nvPr/>
+      </p:nvGrpSpPr>
+      <p:grpSpPr/>
+      <p:sp>
+        <p:nvSpPr>
+          <p:cNvPr id="2" name="TextBox 1"/>
+          <p:cNvSpPr txBox="1"/>
+          <p:nvPr/>
+        </p:nvSpPr>
+        <p:spPr>
+          <a:xfrm>
+            <a:off x="731520" y="274320"/>
+            <a:ext cx="7680960" cy="822960"/>
+          </a:xfrm>
+          <a:prstGeom prst="rect">
+            <a:avLst/>
+          </a:prstGeom>
+          <a:noFill/>
+        </p:spPr>
+        <p:txBody>
+          <a:bodyPr wrap="square">
+            <a:spAutoFit/>
+          </a:bodyPr>
+          <a:lstStyle/>
+          <a:p>
+            <a:pPr algn="l">
+              <a:defRPr sz="2600" b="1" i="0">
+                <a:solidFill>
+                  <a:srgbClr val="1A1A1A"/>
+                </a:solidFill>
+                <a:latin typeface="Montserrat"/>
+              </a:defRPr>
+            </a:pPr>
+            <a:r>
+              <a:t>Заголовок слайда 4</a:t>
+            </a:r>
+          </a:p>
+        </p:txBody>
+      </p:sp>
+      <p:sp>
+        <p:nvSpPr>
+          <p:cNvPr id="3" name="Rectangle 2"/>
+          <p:cNvSpPr/>
+          <p:nvPr/>
+        </p:nvSpPr>
+        <p:spPr>
+          <a:xfrm>
+            <a:off x="731520" y="1005840"/>
+            <a:ext cx="1371600" cy="38100"/>
+          </a:xfrm>
+          <a:prstGeom prst="rect">
+            <a:avLst/>
+          </a:prstGeom>
+          <a:solidFill>
+            <a:srgbClr val="2D2D2D"/>
+          </a:solidFill>
+          <a:ln>
+            <a:noFill/>
+          </a:ln>
+        </p:spPr>
+        <p:style>
+          <a:lnRef idx="1">
+            <a:schemeClr val="accent1"/>
+          </a:lnRef>
+          <a:fillRef idx="3">
+            <a:schemeClr val="accent1"/>
+          </a:fillRef>
+          <a:effectRef idx="2">
+            <a:schemeClr val="accent1"/>
+          </a:effectRef>
+          <a:fontRef idx="minor">
+            <a:schemeClr val="lt1"/>
+          </a:fontRef>
+        </p:style>
+        <p:txBody>
+          <a:bodyPr rtlCol="0" anchor="ctr"/>
+          <a:lstStyle/>
+          <a:p>
+            <a:pPr algn="ctr"/>
+          </a:p>
+        </p:txBody>
+      </p:sp>
+      <p:sp>
+        <p:nvSpPr>
+          <p:cNvPr id="4" name="TextBox 3"/>
+          <p:cNvSpPr txBox="1"/>
+          <p:nvPr/>
+        </p:nvSpPr>
+        <p:spPr>
+          <a:xfrm>
+            <a:off x="731520" y="1371600"/>
+            <a:ext cx="7680960" cy="5029200"/>
+          </a:xfrm>
+          <a:prstGeom prst="rect">
+            <a:avLst/>
+          </a:prstGeom>
+          <a:noFill/>
+        </p:spPr>
+        <p:txBody>
+          <a:bodyPr wrap="square">
+            <a:spAutoFit/>
+          </a:bodyPr>
+          <a:lstStyle/>
+          <a:p>
+            <a:pPr>
+              <a:defRPr sz="1600">
+                <a:solidFill>
+                  <a:srgbClr val="3A3A3A"/>
+                </a:solidFill>
+                <a:latin typeface="Open Sans"/>
+              </a:defRPr>
+            </a:pPr>
+            <a:r>
+              <a:t>[Здесь размещается контент слайда]</a:t>
+            </a:r>
+          </a:p>
+        </p:txBody>
+      </p:sp>
+      <p:sp>
+        <p:nvSpPr>
+          <p:cNvPr id="5" name="TextBox 4"/>
+          <p:cNvSpPr txBox="1"/>
+          <p:nvPr/>
+        </p:nvSpPr>
+        <p:spPr>
+          <a:xfrm>
+            <a:off x="8229600" y="6400800"/>
+            <a:ext cx="731520" cy="365760"/>
+          </a:xfrm>
+          <a:prstGeom prst="rect">
+            <a:avLst/>
+          </a:prstGeom>
+          <a:noFill/>
+        </p:spPr>
+        <p:txBody>
+          <a:bodyPr wrap="square">
+            <a:spAutoFit/>
+          </a:bodyPr>
+          <a:lstStyle/>
+          <a:p>
+            <a:pPr algn="r">
+              <a:defRPr sz="1000" b="0" i="0">
+                <a:solidFill>
+                  <a:srgbClr val="7A7A7A"/>
+                </a:solidFill>
+                <a:latin typeface="Open Sans"/>
+              </a:defRPr>
+            </a:pPr>
+            <a:r>
+              <a:t>4</a:t>
+            </a:r>
+          </a:p>
+        </p:txBody>
+      </p:sp>
+    </p:spTree>
+  </p:cSld>
+  <p:clrMapOvr>
+    <a:masterClrMapping/>
+  </p:clrMapOvr>
+</p:sld>
+</file>
+
+<file path=ppt/slides/slide5.xml><?xml version="1.0" encoding="utf-8"?>
+<p:sld xmlns:a="http://schemas.openxmlformats.org/drawingml/2006/main" xmlns:p="http://schemas.openxmlformats.org/presentationml/2006/main" xmlns:r="http://schemas.openxmlformats.org/officeDocument/2006/relationships">
+  <p:cSld>
+    <p:bg>
+      <p:bgPr>
+        <a:solidFill>
+          <a:srgbClr val="FFFFFF"/>
+        </a:solidFill>
+        <a:effectLst/>
+      </p:bgPr>
+    </p:bg>
+    <p:spTree>
+      <p:nvGrpSpPr>
+        <p:cNvPr id="1" name=""/>
+        <p:cNvGrpSpPr/>
+        <p:nvPr/>
+      </p:nvGrpSpPr>
+      <p:grpSpPr/>
+      <p:sp>
+        <p:nvSpPr>
+          <p:cNvPr id="2" name="TextBox 1"/>
+          <p:cNvSpPr txBox="1"/>
+          <p:nvPr/>
+        </p:nvSpPr>
+        <p:spPr>
+          <a:xfrm>
+            <a:off x="731520" y="274320"/>
+            <a:ext cx="7680960" cy="822960"/>
+          </a:xfrm>
+          <a:prstGeom prst="rect">
+            <a:avLst/>
+          </a:prstGeom>
+          <a:noFill/>
+        </p:spPr>
+        <p:txBody>
+          <a:bodyPr wrap="square">
+            <a:spAutoFit/>
+          </a:bodyPr>
+          <a:lstStyle/>
+          <a:p>
+            <a:pPr algn="l">
+              <a:defRPr sz="2600" b="1" i="0">
+                <a:solidFill>
+                  <a:srgbClr val="1A1A1A"/>
+                </a:solidFill>
+                <a:latin typeface="Montserrat"/>
+              </a:defRPr>
+            </a:pPr>
+            <a:r>
+              <a:t>Заголовок слайда 5</a:t>
+            </a:r>
+          </a:p>
+        </p:txBody>
+      </p:sp>
+      <p:sp>
+        <p:nvSpPr>
+          <p:cNvPr id="3" name="Rectangle 2"/>
+          <p:cNvSpPr/>
+          <p:nvPr/>
+        </p:nvSpPr>
+        <p:spPr>
+          <a:xfrm>
+            <a:off x="731520" y="1005840"/>
+            <a:ext cx="1371600" cy="38100"/>
+          </a:xfrm>
+          <a:prstGeom prst="rect">
+            <a:avLst/>
+          </a:prstGeom>
+          <a:solidFill>
+            <a:srgbClr val="2D2D2D"/>
+          </a:solidFill>
+          <a:ln>
+            <a:noFill/>
+          </a:ln>
+        </p:spPr>
+        <p:style>
+          <a:lnRef idx="1">
+            <a:schemeClr val="accent1"/>
+          </a:lnRef>
+          <a:fillRef idx="3">
+            <a:schemeClr val="accent1"/>
+          </a:fillRef>
+          <a:effectRef idx="2">
+            <a:schemeClr val="accent1"/>
+          </a:effectRef>
+          <a:fontRef idx="minor">
+            <a:schemeClr val="lt1"/>
+          </a:fontRef>
+        </p:style>
+        <p:txBody>
+          <a:bodyPr rtlCol="0" anchor="ctr"/>
+          <a:lstStyle/>
+          <a:p>
+            <a:pPr algn="ctr"/>
+          </a:p>
+        </p:txBody>
+      </p:sp>
+      <p:sp>
+        <p:nvSpPr>
+          <p:cNvPr id="4" name="TextBox 3"/>
+          <p:cNvSpPr txBox="1"/>
+          <p:nvPr/>
+        </p:nvSpPr>
+        <p:spPr>
+          <a:xfrm>
+            <a:off x="731520" y="1371600"/>
+            <a:ext cx="7680960" cy="5029200"/>
+          </a:xfrm>
+          <a:prstGeom prst="rect">
+            <a:avLst/>
+          </a:prstGeom>
+          <a:noFill/>
+        </p:spPr>
+        <p:txBody>
+          <a:bodyPr wrap="square">
+            <a:spAutoFit/>
+          </a:bodyPr>
+          <a:lstStyle/>
+          <a:p>
+            <a:pPr>
+              <a:defRPr sz="1600">
+                <a:solidFill>
+                  <a:srgbClr val="3A3A3A"/>
+                </a:solidFill>
+                <a:latin typeface="Open Sans"/>
+              </a:defRPr>
+            </a:pPr>
+            <a:r>
+              <a:t>[Здесь размещается контент слайда]</a:t>
+            </a:r>
+          </a:p>
+        </p:txBody>
+      </p:sp>
+      <p:sp>
+        <p:nvSpPr>
+          <p:cNvPr id="5" name="TextBox 4"/>
+          <p:cNvSpPr txBox="1"/>
+          <p:nvPr/>
+        </p:nvSpPr>
+        <p:spPr>
+          <a:xfrm>
+            <a:off x="8229600" y="6400800"/>
+            <a:ext cx="731520" cy="365760"/>
+          </a:xfrm>
+          <a:prstGeom prst="rect">
+            <a:avLst/>
+          </a:prstGeom>
+          <a:noFill/>
+        </p:spPr>
+        <p:txBody>
+          <a:bodyPr wrap="square">
+            <a:spAutoFit/>
+          </a:bodyPr>
+          <a:lstStyle/>
+          <a:p>
+            <a:pPr algn="r">
+              <a:defRPr sz="1000" b="0" i="0">
+                <a:solidFill>
+                  <a:srgbClr val="7A7A7A"/>
+                </a:solidFill>
+                <a:latin typeface="Open Sans"/>
+              </a:defRPr>
+            </a:pPr>
+            <a:r>
+              <a:t>5</a:t>
+            </a:r>
+          </a:p>
+        </p:txBody>
+      </p:sp>
+    </p:spTree>
+  </p:cSld>
+  <p:clrMapOvr>
+    <a:masterClrMapping/>
+  </p:clrMapOvr>
+</p:sld>
+</file>
+
+<file path=ppt/slides/slide6.xml><?xml version="1.0" encoding="utf-8"?>
+<p:sld xmlns:a="http://schemas.openxmlformats.org/drawingml/2006/main" xmlns:p="http://schemas.openxmlformats.org/presentationml/2006/main" xmlns:r="http://schemas.openxmlformats.org/officeDocument/2006/relationships">
+  <p:cSld>
+    <p:bg>
+      <p:bgPr>
+        <a:solidFill>
+          <a:srgbClr val="FFFFFF"/>
+        </a:solidFill>
+        <a:effectLst/>
+      </p:bgPr>
+    </p:bg>
+    <p:spTree>
+      <p:nvGrpSpPr>
+        <p:cNvPr id="1" name=""/>
+        <p:cNvGrpSpPr/>
+        <p:nvPr/>
+      </p:nvGrpSpPr>
+      <p:grpSpPr/>
+      <p:sp>
+        <p:nvSpPr>
+          <p:cNvPr id="2" name="TextBox 1"/>
+          <p:cNvSpPr txBox="1"/>
+          <p:nvPr/>
+        </p:nvSpPr>
+        <p:spPr>
+          <a:xfrm>
+            <a:off x="731520" y="274320"/>
+            <a:ext cx="7680960" cy="822960"/>
+          </a:xfrm>
+          <a:prstGeom prst="rect">
+            <a:avLst/>
+          </a:prstGeom>
+          <a:noFill/>
+        </p:spPr>
+        <p:txBody>
+          <a:bodyPr wrap="square">
+            <a:spAutoFit/>
+          </a:bodyPr>
+          <a:lstStyle/>
+          <a:p>
+            <a:pPr algn="l">
+              <a:defRPr sz="2600" b="1" i="0">
+                <a:solidFill>
+                  <a:srgbClr val="1A1A1A"/>
+                </a:solidFill>
+                <a:latin typeface="Montserrat"/>
+              </a:defRPr>
+            </a:pPr>
+            <a:r>
+              <a:t>Заголовок слайда 6</a:t>
+            </a:r>
+          </a:p>
+        </p:txBody>
+      </p:sp>
+      <p:sp>
+        <p:nvSpPr>
+          <p:cNvPr id="3" name="Rectangle 2"/>
+          <p:cNvSpPr/>
+          <p:nvPr/>
+        </p:nvSpPr>
+        <p:spPr>
+          <a:xfrm>
+            <a:off x="731520" y="1005840"/>
+            <a:ext cx="1371600" cy="38100"/>
+          </a:xfrm>
+          <a:prstGeom prst="rect">
+            <a:avLst/>
+          </a:prstGeom>
+          <a:solidFill>
+            <a:srgbClr val="2D2D2D"/>
+          </a:solidFill>
+          <a:ln>
+            <a:noFill/>
+          </a:ln>
+        </p:spPr>
+        <p:style>
+          <a:lnRef idx="1">
+            <a:schemeClr val="accent1"/>
+          </a:lnRef>
+          <a:fillRef idx="3">
+            <a:schemeClr val="accent1"/>
+          </a:fillRef>
+          <a:effectRef idx="2">
+            <a:schemeClr val="accent1"/>
+          </a:effectRef>
+          <a:fontRef idx="minor">
+            <a:schemeClr val="lt1"/>
+          </a:fontRef>
+        </p:style>
+        <p:txBody>
+          <a:bodyPr rtlCol="0" anchor="ctr"/>
+          <a:lstStyle/>
+          <a:p>
+            <a:pPr algn="ctr"/>
+          </a:p>
+        </p:txBody>
+      </p:sp>
+      <p:sp>
+        <p:nvSpPr>
+          <p:cNvPr id="4" name="TextBox 3"/>
+          <p:cNvSpPr txBox="1"/>
+          <p:nvPr/>
+        </p:nvSpPr>
+        <p:spPr>
+          <a:xfrm>
+            <a:off x="731520" y="1371600"/>
+            <a:ext cx="7680960" cy="5029200"/>
+          </a:xfrm>
+          <a:prstGeom prst="rect">
+            <a:avLst/>
+          </a:prstGeom>
+          <a:noFill/>
+        </p:spPr>
+        <p:txBody>
+          <a:bodyPr wrap="square">
+            <a:spAutoFit/>
+          </a:bodyPr>
+          <a:lstStyle/>
+          <a:p>
+            <a:pPr>
+              <a:defRPr sz="1600">
+                <a:solidFill>
+                  <a:srgbClr val="3A3A3A"/>
+                </a:solidFill>
+                <a:latin typeface="Open Sans"/>
+              </a:defRPr>
+            </a:pPr>
+            <a:r>
+              <a:t>[Здесь размещается контент слайда]</a:t>
+            </a:r>
+          </a:p>
+        </p:txBody>
+      </p:sp>
+      <p:sp>
+        <p:nvSpPr>
+          <p:cNvPr id="5" name="TextBox 4"/>
+          <p:cNvSpPr txBox="1"/>
+          <p:nvPr/>
+        </p:nvSpPr>
+        <p:spPr>
+          <a:xfrm>
+            <a:off x="8229600" y="6400800"/>
+            <a:ext cx="731520" cy="365760"/>
+          </a:xfrm>
+          <a:prstGeom prst="rect">
+            <a:avLst/>
+          </a:prstGeom>
+          <a:noFill/>
+        </p:spPr>
+        <p:txBody>
+          <a:bodyPr wrap="square">
+            <a:spAutoFit/>
+          </a:bodyPr>
+          <a:lstStyle/>
+          <a:p>
+            <a:pPr algn="r">
+              <a:defRPr sz="1000" b="0" i="0">
+                <a:solidFill>
+                  <a:srgbClr val="7A7A7A"/>
+                </a:solidFill>
+                <a:latin typeface="Open Sans"/>
+              </a:defRPr>
+            </a:pPr>
+            <a:r>
+              <a:t>6</a:t>
+            </a:r>
+          </a:p>
+        </p:txBody>
+      </p:sp>
+    </p:spTree>
+  </p:cSld>
+  <p:clrMapOvr>
+    <a:masterClrMapping/>
+  </p:clrMapOvr>
+</p:sld>
+</file>
+
+<file path=ppt/slides/slide7.xml><?xml version="1.0" encoding="utf-8"?>
+<p:sld xmlns:a="http://schemas.openxmlformats.org/drawingml/2006/main" xmlns:p="http://schemas.openxmlformats.org/presentationml/2006/main" xmlns:r="http://schemas.openxmlformats.org/officeDocument/2006/relationships">
+  <p:cSld>
+    <p:bg>
+      <p:bgPr>
+        <a:solidFill>
+          <a:srgbClr val="FFFFFF"/>
+        </a:solidFill>
+        <a:effectLst/>
+      </p:bgPr>
+    </p:bg>
+    <p:spTree>
+      <p:nvGrpSpPr>
+        <p:cNvPr id="1" name=""/>
+        <p:cNvGrpSpPr/>
+        <p:nvPr/>
+      </p:nvGrpSpPr>
+      <p:grpSpPr/>
+      <p:sp>
+        <p:nvSpPr>
+          <p:cNvPr id="2" name="TextBox 1"/>
+          <p:cNvSpPr txBox="1"/>
+          <p:nvPr/>
+        </p:nvSpPr>
+        <p:spPr>
+          <a:xfrm>
+            <a:off x="731520" y="274320"/>
+            <a:ext cx="7680960" cy="822960"/>
+          </a:xfrm>
+          <a:prstGeom prst="rect">
+            <a:avLst/>
+          </a:prstGeom>
+          <a:noFill/>
+        </p:spPr>
+        <p:txBody>
+          <a:bodyPr wrap="square">
+            <a:spAutoFit/>
+          </a:bodyPr>
+          <a:lstStyle/>
+          <a:p>
+            <a:pPr algn="l">
+              <a:defRPr sz="2600" b="1" i="0">
+                <a:solidFill>
+                  <a:srgbClr val="1A1A1A"/>
+                </a:solidFill>
+                <a:latin typeface="Montserrat"/>
+              </a:defRPr>
+            </a:pPr>
+            <a:r>
+              <a:t>Заголовок слайда 7</a:t>
+            </a:r>
+          </a:p>
+        </p:txBody>
+      </p:sp>
+      <p:sp>
+        <p:nvSpPr>
+          <p:cNvPr id="3" name="Rectangle 2"/>
+          <p:cNvSpPr/>
+          <p:nvPr/>
+        </p:nvSpPr>
+        <p:spPr>
+          <a:xfrm>
+            <a:off x="731520" y="1005840"/>
+            <a:ext cx="1371600" cy="38100"/>
+          </a:xfrm>
+          <a:prstGeom prst="rect">
+            <a:avLst/>
+          </a:prstGeom>
+          <a:solidFill>
+            <a:srgbClr val="2D2D2D"/>
+          </a:solidFill>
+          <a:ln>
+            <a:noFill/>
+          </a:ln>
+        </p:spPr>
+        <p:style>
+          <a:lnRef idx="1">
+            <a:schemeClr val="accent1"/>
+          </a:lnRef>
+          <a:fillRef idx="3">
+            <a:schemeClr val="accent1"/>
+          </a:fillRef>
+          <a:effectRef idx="2">
+            <a:schemeClr val="accent1"/>
+          </a:effectRef>
+          <a:fontRef idx="minor">
+            <a:schemeClr val="lt1"/>
+          </a:fontRef>
+        </p:style>
+        <p:txBody>
+          <a:bodyPr rtlCol="0" anchor="ctr"/>
+          <a:lstStyle/>
+          <a:p>
+            <a:pPr algn="ctr"/>
+          </a:p>
+        </p:txBody>
+      </p:sp>
+      <p:sp>
+        <p:nvSpPr>
+          <p:cNvPr id="4" name="TextBox 3"/>
+          <p:cNvSpPr txBox="1"/>
+          <p:nvPr/>
+        </p:nvSpPr>
+        <p:spPr>
+          <a:xfrm>
+            <a:off x="731520" y="1371600"/>
+            <a:ext cx="7680960" cy="5029200"/>
+          </a:xfrm>
+          <a:prstGeom prst="rect">
+            <a:avLst/>
+          </a:prstGeom>
+          <a:noFill/>
+        </p:spPr>
+        <p:txBody>
+          <a:bodyPr wrap="square">
+            <a:spAutoFit/>
+          </a:bodyPr>
+          <a:lstStyle/>
+          <a:p>
+            <a:pPr>
+              <a:defRPr sz="1600">
+                <a:solidFill>
+                  <a:srgbClr val="3A3A3A"/>
+                </a:solidFill>
+                <a:latin typeface="Open Sans"/>
+              </a:defRPr>
+            </a:pPr>
+            <a:r>
+              <a:t>[Здесь размещается контент слайда]</a:t>
+            </a:r>
+          </a:p>
+        </p:txBody>
+      </p:sp>
+      <p:sp>
+        <p:nvSpPr>
+          <p:cNvPr id="5" name="TextBox 4"/>
+          <p:cNvSpPr txBox="1"/>
+          <p:nvPr/>
+        </p:nvSpPr>
+        <p:spPr>
+          <a:xfrm>
+            <a:off x="8229600" y="6400800"/>
+            <a:ext cx="731520" cy="365760"/>
+          </a:xfrm>
+          <a:prstGeom prst="rect">
+            <a:avLst/>
+          </a:prstGeom>
+          <a:noFill/>
+        </p:spPr>
+        <p:txBody>
+          <a:bodyPr wrap="square">
+            <a:spAutoFit/>
+          </a:bodyPr>
+          <a:lstStyle/>
+          <a:p>
+            <a:pPr algn="r">
+              <a:defRPr sz="1000" b="0" i="0">
+                <a:solidFill>
+                  <a:srgbClr val="7A7A7A"/>
+                </a:solidFill>
+                <a:latin typeface="Open Sans"/>
+              </a:defRPr>
+            </a:pPr>
+            <a:r>
+              <a:t>7</a:t>
+            </a:r>
+          </a:p>
+        </p:txBody>
+      </p:sp>
+    </p:spTree>
+  </p:cSld>
+  <p:clrMapOvr>
+    <a:masterClrMapping/>
+  </p:clrMapOvr>
+</p:sld>
+</file>
+
+<file path=ppt/slides/slide8.xml><?xml version="1.0" encoding="utf-8"?>
+<p:sld xmlns:a="http://schemas.openxmlformats.org/drawingml/2006/main" xmlns:p="http://schemas.openxmlformats.org/presentationml/2006/main" xmlns:r="http://schemas.openxmlformats.org/officeDocument/2006/relationships">
+  <p:cSld>
+    <p:bg>
+      <p:bgPr>
         <a:gradFill rotWithShape="1">
           <a:gsLst>
             <a:gs pos="0">
-              <a:srgbClr val="1A1A2E"/>
+              <a:srgbClr val="FFFFFF"/>
             </a:gs>
             <a:gs pos="100000">
-              <a:srgbClr val="16213E"/>
+              <a:srgbClr val="F0F0F0"/>
             </a:gs>
           </a:gsLst>
           <a:lin scaled="0"/>
@@ -3379,55 +4518,20 @@
       <p:grpSpPr/>
       <p:sp>
         <p:nvSpPr>
-          <p:cNvPr id="2" name="TextBox 1"/>
-          <p:cNvSpPr txBox="1"/>
-          <p:nvPr/>
-        </p:nvSpPr>
-        <p:spPr>
-          <a:xfrm>
-            <a:off x="914400" y="1371600"/>
-            <a:ext cx="1828800" cy="1828800"/>
-          </a:xfrm>
-          <a:prstGeom prst="rect">
-            <a:avLst/>
-          </a:prstGeom>
-          <a:noFill/>
-        </p:spPr>
-        <p:txBody>
-          <a:bodyPr wrap="none">
-            <a:spAutoFit/>
-          </a:bodyPr>
-          <a:lstStyle/>
-          <a:p>
-            <a:pPr>
-              <a:defRPr sz="7200" b="1">
-                <a:solidFill>
-                  <a:srgbClr val="0F8B8D"/>
-                </a:solidFill>
-              </a:defRPr>
-            </a:pPr>
-            <a:r>
-              <a:t>01</a:t>
-            </a:r>
-          </a:p>
-        </p:txBody>
-      </p:sp>
-      <p:sp>
-        <p:nvSpPr>
-          <p:cNvPr id="3" name="Rectangle 2"/>
+          <p:cNvPr id="2" name="Oval 1"/>
           <p:cNvSpPr/>
           <p:nvPr/>
         </p:nvSpPr>
         <p:spPr>
           <a:xfrm>
-            <a:off x="914400" y="3474720"/>
-            <a:ext cx="2743200" cy="38100"/>
-          </a:xfrm>
-          <a:prstGeom prst="rect">
+            <a:off x="6400800" y="3657600"/>
+            <a:ext cx="3657600" cy="3657600"/>
+          </a:xfrm>
+          <a:prstGeom prst="ellipse">
             <a:avLst/>
           </a:prstGeom>
           <a:solidFill>
-            <a:srgbClr val="0F8B8D"/>
+            <a:srgbClr val="2D2D2D"/>
           </a:solidFill>
           <a:ln>
             <a:noFill/>
@@ -3457,14 +4561,14 @@
       </p:sp>
       <p:sp>
         <p:nvSpPr>
-          <p:cNvPr id="4" name="TextBox 3"/>
+          <p:cNvPr id="3" name="TextBox 2"/>
           <p:cNvSpPr txBox="1"/>
           <p:nvPr/>
         </p:nvSpPr>
         <p:spPr>
           <a:xfrm>
-            <a:off x="914400" y="3657600"/>
-            <a:ext cx="7315200" cy="1371600"/>
+            <a:off x="1097280" y="2286000"/>
+            <a:ext cx="6400800" cy="1371600"/>
           </a:xfrm>
           <a:prstGeom prst="rect">
             <a:avLst/>
@@ -3477,55 +4581,30 @@
           </a:bodyPr>
           <a:lstStyle/>
           <a:p>
-            <a:pPr>
-              <a:defRPr sz="3200" b="1">
+            <a:pPr algn="l">
+              <a:defRPr sz="3400" b="1" i="0">
                 <a:solidFill>
-                  <a:srgbClr val="FFFFFF"/>
+                  <a:srgbClr val="1A1A1A"/>
                 </a:solidFill>
+                <a:latin typeface="Montserrat"/>
               </a:defRPr>
             </a:pPr>
             <a:r>
-              <a:t>НАЗВАНИЕ РАЗДЕЛА</a:t>
-            </a:r>
-          </a:p>
-        </p:txBody>
-      </p:sp>
-    </p:spTree>
-  </p:cSld>
-  <p:clrMapOvr>
-    <a:masterClrMapping/>
-  </p:clrMapOvr>
-</p:sld>
-</file>
-
-<file path=ppt/slides/slide3.xml><?xml version="1.0" encoding="utf-8"?>
-<p:sld xmlns:a="http://schemas.openxmlformats.org/drawingml/2006/main" xmlns:p="http://schemas.openxmlformats.org/presentationml/2006/main" xmlns:r="http://schemas.openxmlformats.org/officeDocument/2006/relationships">
-  <p:cSld>
-    <p:bg>
-      <p:bgPr>
-        <a:solidFill>
-          <a:srgbClr val="1A1A2E"/>
-        </a:solidFill>
-        <a:effectLst/>
-      </p:bgPr>
-    </p:bg>
-    <p:spTree>
-      <p:nvGrpSpPr>
-        <p:cNvPr id="1" name=""/>
-        <p:cNvGrpSpPr/>
-        <p:nvPr/>
-      </p:nvGrpSpPr>
-      <p:grpSpPr/>
-      <p:sp>
-        <p:nvSpPr>
-          <p:cNvPr id="2" name="TextBox 1"/>
+              <a:t>СПАСИБО ЗА ВНИМАНИЕ</a:t>
+            </a:r>
+          </a:p>
+        </p:txBody>
+      </p:sp>
+      <p:sp>
+        <p:nvSpPr>
+          <p:cNvPr id="4" name="TextBox 3"/>
           <p:cNvSpPr txBox="1"/>
           <p:nvPr/>
         </p:nvSpPr>
         <p:spPr>
           <a:xfrm>
-            <a:off x="731520" y="365760"/>
-            <a:ext cx="7680960" cy="731520"/>
+            <a:off x="1097280" y="3840480"/>
+            <a:ext cx="5486400" cy="731520"/>
           </a:xfrm>
           <a:prstGeom prst="rect">
             <a:avLst/>
@@ -3533,77 +4612,35 @@
           <a:noFill/>
         </p:spPr>
         <p:txBody>
-          <a:bodyPr wrap="none">
+          <a:bodyPr wrap="square">
             <a:spAutoFit/>
           </a:bodyPr>
           <a:lstStyle/>
           <a:p>
-            <a:pPr>
-              <a:defRPr sz="2800" b="1">
+            <a:pPr algn="l">
+              <a:defRPr sz="1800" b="0" i="0">
                 <a:solidFill>
-                  <a:srgbClr val="FFFFFF"/>
+                  <a:srgbClr val="5A5A5A"/>
                 </a:solidFill>
+                <a:latin typeface="Open Sans"/>
               </a:defRPr>
             </a:pPr>
             <a:r>
-              <a:t>Заголовок слайда</a:t>
-            </a:r>
-          </a:p>
-        </p:txBody>
-      </p:sp>
-      <p:sp>
-        <p:nvSpPr>
-          <p:cNvPr id="3" name="Rectangle 2"/>
-          <p:cNvSpPr/>
-          <p:nvPr/>
-        </p:nvSpPr>
-        <p:spPr>
-          <a:xfrm>
-            <a:off x="731520" y="1097280"/>
-            <a:ext cx="1371600" cy="38100"/>
-          </a:xfrm>
-          <a:prstGeom prst="rect">
-            <a:avLst/>
-          </a:prstGeom>
-          <a:solidFill>
-            <a:srgbClr val="0F8B8D"/>
-          </a:solidFill>
-          <a:ln>
-            <a:noFill/>
-          </a:ln>
-        </p:spPr>
-        <p:style>
-          <a:lnRef idx="1">
-            <a:schemeClr val="accent1"/>
-          </a:lnRef>
-          <a:fillRef idx="3">
-            <a:schemeClr val="accent1"/>
-          </a:fillRef>
-          <a:effectRef idx="2">
-            <a:schemeClr val="accent1"/>
-          </a:effectRef>
-          <a:fontRef idx="minor">
-            <a:schemeClr val="lt1"/>
-          </a:fontRef>
-        </p:style>
-        <p:txBody>
-          <a:bodyPr rtlCol="0" anchor="ctr"/>
-          <a:lstStyle/>
-          <a:p>
-            <a:pPr algn="ctr"/>
-          </a:p>
-        </p:txBody>
-      </p:sp>
-      <p:sp>
-        <p:nvSpPr>
-          <p:cNvPr id="4" name="TextBox 3"/>
+              <a:t>Готов ответить на вопросы</a:t>
+            </a:r>
+          </a:p>
+        </p:txBody>
+      </p:sp>
+      <p:sp>
+        <p:nvSpPr>
+          <p:cNvPr id="5" name="TextBox 4"/>
           <p:cNvSpPr txBox="1"/>
           <p:nvPr/>
         </p:nvSpPr>
         <p:spPr>
           <a:xfrm>
-            <a:off x="731520" y="1371600"/>
-            <a:ext cx="7680960" cy="5029200"/>
+            <a:off x="1097280" y="5029200"/>
+            <a:ext cx="5486400" cy="548640"/>
           </a:xfrm>
           <a:prstGeom prst="rect">
             <a:avLst/>
@@ -3616,648 +4653,16 @@
           </a:bodyPr>
           <a:lstStyle/>
           <a:p>
-            <a:pPr>
-              <a:spcBef>
-                <a:spcPts val="1600"/>
-              </a:spcBef>
-              <a:defRPr sz="1600">
+            <a:pPr algn="l">
+              <a:defRPr sz="1200" b="0" i="0">
                 <a:solidFill>
-                  <a:srgbClr val="E8E8E8"/>
+                  <a:srgbClr val="7A7A7A"/>
                 </a:solidFill>
+                <a:latin typeface="Open Sans"/>
               </a:defRPr>
             </a:pPr>
             <a:r>
-              <a:t>  Первый ключевой пункт вашей презентации</a:t>
-            </a:r>
-          </a:p>
-          <a:p>
-            <a:pPr>
-              <a:spcBef>
-                <a:spcPts val="1600"/>
-              </a:spcBef>
-              <a:defRPr sz="1600">
-                <a:solidFill>
-                  <a:srgbClr val="E8E8E8"/>
-                </a:solidFill>
-              </a:defRPr>
-            </a:pPr>
-            <a:r>
-              <a:t>  Второй важный момент для аудитории</a:t>
-            </a:r>
-          </a:p>
-          <a:p>
-            <a:pPr>
-              <a:spcBef>
-                <a:spcPts val="1600"/>
-              </a:spcBef>
-              <a:defRPr sz="1600">
-                <a:solidFill>
-                  <a:srgbClr val="E8E8E8"/>
-                </a:solidFill>
-              </a:defRPr>
-            </a:pPr>
-            <a:r>
-              <a:t>  Третий пункт с дополнительной информацией</a:t>
-            </a:r>
-          </a:p>
-          <a:p>
-            <a:pPr>
-              <a:spcBef>
-                <a:spcPts val="1600"/>
-              </a:spcBef>
-              <a:defRPr sz="1600">
-                <a:solidFill>
-                  <a:srgbClr val="E8E8E8"/>
-                </a:solidFill>
-              </a:defRPr>
-            </a:pPr>
-            <a:r>
-              <a:t>  Четвёртый пункт — выводы или примеры</a:t>
-            </a:r>
-          </a:p>
-        </p:txBody>
-      </p:sp>
-    </p:spTree>
-  </p:cSld>
-  <p:clrMapOvr>
-    <a:masterClrMapping/>
-  </p:clrMapOvr>
-</p:sld>
-</file>
-
-<file path=ppt/slides/slide4.xml><?xml version="1.0" encoding="utf-8"?>
-<p:sld xmlns:a="http://schemas.openxmlformats.org/drawingml/2006/main" xmlns:p="http://schemas.openxmlformats.org/presentationml/2006/main" xmlns:r="http://schemas.openxmlformats.org/officeDocument/2006/relationships">
-  <p:cSld>
-    <p:bg>
-      <p:bgPr>
-        <a:solidFill>
-          <a:srgbClr val="1A1A2E"/>
-        </a:solidFill>
-        <a:effectLst/>
-      </p:bgPr>
-    </p:bg>
-    <p:spTree>
-      <p:nvGrpSpPr>
-        <p:cNvPr id="1" name=""/>
-        <p:cNvGrpSpPr/>
-        <p:nvPr/>
-      </p:nvGrpSpPr>
-      <p:grpSpPr/>
-      <p:sp>
-        <p:nvSpPr>
-          <p:cNvPr id="2" name="TextBox 1"/>
-          <p:cNvSpPr txBox="1"/>
-          <p:nvPr/>
-        </p:nvSpPr>
-        <p:spPr>
-          <a:xfrm>
-            <a:off x="731520" y="365760"/>
-            <a:ext cx="7680960" cy="731520"/>
-          </a:xfrm>
-          <a:prstGeom prst="rect">
-            <a:avLst/>
-          </a:prstGeom>
-          <a:noFill/>
-        </p:spPr>
-        <p:txBody>
-          <a:bodyPr wrap="none">
-            <a:spAutoFit/>
-          </a:bodyPr>
-          <a:lstStyle/>
-          <a:p>
-            <a:pPr>
-              <a:defRPr sz="2800" b="1">
-                <a:solidFill>
-                  <a:srgbClr val="FFFFFF"/>
-                </a:solidFill>
-              </a:defRPr>
-            </a:pPr>
-            <a:r>
-              <a:t>Сравнение / Два аспекта</a:t>
-            </a:r>
-          </a:p>
-        </p:txBody>
-      </p:sp>
-      <p:sp>
-        <p:nvSpPr>
-          <p:cNvPr id="3" name="Rectangle 2"/>
-          <p:cNvSpPr/>
-          <p:nvPr/>
-        </p:nvSpPr>
-        <p:spPr>
-          <a:xfrm>
-            <a:off x="731520" y="1097280"/>
-            <a:ext cx="1371600" cy="38100"/>
-          </a:xfrm>
-          <a:prstGeom prst="rect">
-            <a:avLst/>
-          </a:prstGeom>
-          <a:solidFill>
-            <a:srgbClr val="0F8B8D"/>
-          </a:solidFill>
-          <a:ln>
-            <a:noFill/>
-          </a:ln>
-        </p:spPr>
-        <p:style>
-          <a:lnRef idx="1">
-            <a:schemeClr val="accent1"/>
-          </a:lnRef>
-          <a:fillRef idx="3">
-            <a:schemeClr val="accent1"/>
-          </a:fillRef>
-          <a:effectRef idx="2">
-            <a:schemeClr val="accent1"/>
-          </a:effectRef>
-          <a:fontRef idx="minor">
-            <a:schemeClr val="lt1"/>
-          </a:fontRef>
-        </p:style>
-        <p:txBody>
-          <a:bodyPr rtlCol="0" anchor="ctr"/>
-          <a:lstStyle/>
-          <a:p>
-            <a:pPr algn="ctr"/>
-          </a:p>
-        </p:txBody>
-      </p:sp>
-      <p:sp>
-        <p:nvSpPr>
-          <p:cNvPr id="4" name="Rounded Rectangle 3"/>
-          <p:cNvSpPr/>
-          <p:nvPr/>
-        </p:nvSpPr>
-        <p:spPr>
-          <a:xfrm>
-            <a:off x="457200" y="1463040"/>
-            <a:ext cx="3931920" cy="4754880"/>
-          </a:xfrm>
-          <a:prstGeom prst="roundRect">
-            <a:avLst/>
-          </a:prstGeom>
-          <a:solidFill>
-            <a:srgbClr val="16213E"/>
-          </a:solidFill>
-          <a:ln>
-            <a:noFill/>
-          </a:ln>
-        </p:spPr>
-        <p:style>
-          <a:lnRef idx="1">
-            <a:schemeClr val="accent1"/>
-          </a:lnRef>
-          <a:fillRef idx="3">
-            <a:schemeClr val="accent1"/>
-          </a:fillRef>
-          <a:effectRef idx="2">
-            <a:schemeClr val="accent1"/>
-          </a:effectRef>
-          <a:fontRef idx="minor">
-            <a:schemeClr val="lt1"/>
-          </a:fontRef>
-        </p:style>
-        <p:txBody>
-          <a:bodyPr rtlCol="0" anchor="ctr"/>
-          <a:lstStyle/>
-          <a:p>
-            <a:pPr algn="ctr"/>
-          </a:p>
-        </p:txBody>
-      </p:sp>
-      <p:sp>
-        <p:nvSpPr>
-          <p:cNvPr id="5" name="TextBox 4"/>
-          <p:cNvSpPr txBox="1"/>
-          <p:nvPr/>
-        </p:nvSpPr>
-        <p:spPr>
-          <a:xfrm>
-            <a:off x="731520" y="1737360"/>
-            <a:ext cx="3566160" cy="4389120"/>
-          </a:xfrm>
-          <a:prstGeom prst="rect">
-            <a:avLst/>
-          </a:prstGeom>
-          <a:noFill/>
-        </p:spPr>
-        <p:txBody>
-          <a:bodyPr wrap="square">
-            <a:spAutoFit/>
-          </a:bodyPr>
-          <a:lstStyle/>
-          <a:p>
-            <a:pPr>
-              <a:defRPr sz="2000" b="1">
-                <a:solidFill>
-                  <a:srgbClr val="53CED1"/>
-                </a:solidFill>
-              </a:defRPr>
-            </a:pPr>
-            <a:r>
-              <a:t>Аспект 1</a:t>
-            </a:r>
-          </a:p>
-          <a:p>
-            <a:br/>
-            <a:pPr>
-              <a:defRPr sz="1400">
-                <a:solidFill>
-                  <a:srgbClr val="E8E8E8"/>
-                </a:solidFill>
-              </a:defRPr>
-            </a:pPr>
-            <a:r>
-              <a:t>Описание первого аспекта или колонки. Здесь можно разместить ключевые тезисы.</a:t>
-            </a:r>
-          </a:p>
-        </p:txBody>
-      </p:sp>
-      <p:sp>
-        <p:nvSpPr>
-          <p:cNvPr id="6" name="Rounded Rectangle 5"/>
-          <p:cNvSpPr/>
-          <p:nvPr/>
-        </p:nvSpPr>
-        <p:spPr>
-          <a:xfrm>
-            <a:off x="4754880" y="1463040"/>
-            <a:ext cx="3931920" cy="4754880"/>
-          </a:xfrm>
-          <a:prstGeom prst="roundRect">
-            <a:avLst/>
-          </a:prstGeom>
-          <a:solidFill>
-            <a:srgbClr val="16213E"/>
-          </a:solidFill>
-          <a:ln>
-            <a:noFill/>
-          </a:ln>
-        </p:spPr>
-        <p:style>
-          <a:lnRef idx="1">
-            <a:schemeClr val="accent1"/>
-          </a:lnRef>
-          <a:fillRef idx="3">
-            <a:schemeClr val="accent1"/>
-          </a:fillRef>
-          <a:effectRef idx="2">
-            <a:schemeClr val="accent1"/>
-          </a:effectRef>
-          <a:fontRef idx="minor">
-            <a:schemeClr val="lt1"/>
-          </a:fontRef>
-        </p:style>
-        <p:txBody>
-          <a:bodyPr rtlCol="0" anchor="ctr"/>
-          <a:lstStyle/>
-          <a:p>
-            <a:pPr algn="ctr"/>
-          </a:p>
-        </p:txBody>
-      </p:sp>
-      <p:sp>
-        <p:nvSpPr>
-          <p:cNvPr id="7" name="TextBox 6"/>
-          <p:cNvSpPr txBox="1"/>
-          <p:nvPr/>
-        </p:nvSpPr>
-        <p:spPr>
-          <a:xfrm>
-            <a:off x="5029200" y="1737360"/>
-            <a:ext cx="3566160" cy="4389120"/>
-          </a:xfrm>
-          <a:prstGeom prst="rect">
-            <a:avLst/>
-          </a:prstGeom>
-          <a:noFill/>
-        </p:spPr>
-        <p:txBody>
-          <a:bodyPr wrap="square">
-            <a:spAutoFit/>
-          </a:bodyPr>
-          <a:lstStyle/>
-          <a:p>
-            <a:pPr>
-              <a:defRPr sz="2000" b="1">
-                <a:solidFill>
-                  <a:srgbClr val="53CED1"/>
-                </a:solidFill>
-              </a:defRPr>
-            </a:pPr>
-            <a:r>
-              <a:t>Аспект 2</a:t>
-            </a:r>
-          </a:p>
-          <a:p>
-            <a:br/>
-            <a:pPr>
-              <a:defRPr sz="1400">
-                <a:solidFill>
-                  <a:srgbClr val="E8E8E8"/>
-                </a:solidFill>
-              </a:defRPr>
-            </a:pPr>
-            <a:r>
-              <a:t>Описание второго аспекта или колонки. Сравнительная информация или альтернатива.</a:t>
-            </a:r>
-          </a:p>
-        </p:txBody>
-      </p:sp>
-    </p:spTree>
-  </p:cSld>
-  <p:clrMapOvr>
-    <a:masterClrMapping/>
-  </p:clrMapOvr>
-</p:sld>
-</file>
-
-<file path=ppt/slides/slide5.xml><?xml version="1.0" encoding="utf-8"?>
-<p:sld xmlns:a="http://schemas.openxmlformats.org/drawingml/2006/main" xmlns:p="http://schemas.openxmlformats.org/presentationml/2006/main" xmlns:r="http://schemas.openxmlformats.org/officeDocument/2006/relationships">
-  <p:cSld>
-    <p:bg>
-      <p:bgPr>
-        <a:gradFill rotWithShape="1">
-          <a:gsLst>
-            <a:gs pos="0">
-              <a:srgbClr val="1A1A2E"/>
-            </a:gs>
-            <a:gs pos="100000">
-              <a:srgbClr val="302B63"/>
-            </a:gs>
-          </a:gsLst>
-          <a:lin scaled="0"/>
-        </a:gradFill>
-        <a:effectLst/>
-      </p:bgPr>
-    </p:bg>
-    <p:spTree>
-      <p:nvGrpSpPr>
-        <p:cNvPr id="1" name=""/>
-        <p:cNvGrpSpPr/>
-        <p:nvPr/>
-      </p:nvGrpSpPr>
-      <p:grpSpPr/>
-      <p:sp>
-        <p:nvSpPr>
-          <p:cNvPr id="2" name="TextBox 1"/>
-          <p:cNvSpPr txBox="1"/>
-          <p:nvPr/>
-        </p:nvSpPr>
-        <p:spPr>
-          <a:xfrm>
-            <a:off x="914400" y="1371600"/>
-            <a:ext cx="1371600" cy="1371600"/>
-          </a:xfrm>
-          <a:prstGeom prst="rect">
-            <a:avLst/>
-          </a:prstGeom>
-          <a:noFill/>
-        </p:spPr>
-        <p:txBody>
-          <a:bodyPr wrap="none">
-            <a:spAutoFit/>
-          </a:bodyPr>
-          <a:lstStyle/>
-          <a:p>
-            <a:pPr>
-              <a:defRPr sz="12000">
-                <a:solidFill>
-                  <a:srgbClr val="0F8B8D"/>
-                </a:solidFill>
-              </a:defRPr>
-            </a:pPr>
-            <a:r>
-              <a:t>“</a:t>
-            </a:r>
-          </a:p>
-        </p:txBody>
-      </p:sp>
-      <p:sp>
-        <p:nvSpPr>
-          <p:cNvPr id="3" name="TextBox 2"/>
-          <p:cNvSpPr txBox="1"/>
-          <p:nvPr/>
-        </p:nvSpPr>
-        <p:spPr>
-          <a:xfrm>
-            <a:off x="1371600" y="2560320"/>
-            <a:ext cx="6400800" cy="2286000"/>
-          </a:xfrm>
-          <a:prstGeom prst="rect">
-            <a:avLst/>
-          </a:prstGeom>
-          <a:noFill/>
-        </p:spPr>
-        <p:txBody>
-          <a:bodyPr wrap="square">
-            <a:spAutoFit/>
-          </a:bodyPr>
-          <a:lstStyle/>
-          <a:p>
-            <a:pPr>
-              <a:defRPr sz="2200" i="1">
-                <a:solidFill>
-                  <a:srgbClr val="FFFFFF"/>
-                </a:solidFill>
-              </a:defRPr>
-            </a:pPr>
-            <a:r>
-              <a:t>Здесь можно разместить важную цитату, ключевую мысль или определение, которое подчёркивает тему вашей презентации.</a:t>
-            </a:r>
-          </a:p>
-        </p:txBody>
-      </p:sp>
-      <p:sp>
-        <p:nvSpPr>
-          <p:cNvPr id="4" name="TextBox 3"/>
-          <p:cNvSpPr txBox="1"/>
-          <p:nvPr/>
-        </p:nvSpPr>
-        <p:spPr>
-          <a:xfrm>
-            <a:off x="1371600" y="5029200"/>
-            <a:ext cx="6400800" cy="457200"/>
-          </a:xfrm>
-          <a:prstGeom prst="rect">
-            <a:avLst/>
-          </a:prstGeom>
-          <a:noFill/>
-        </p:spPr>
-        <p:txBody>
-          <a:bodyPr wrap="none">
-            <a:spAutoFit/>
-          </a:bodyPr>
-          <a:lstStyle/>
-          <a:p>
-            <a:pPr>
-              <a:defRPr sz="1400">
-                <a:solidFill>
-                  <a:srgbClr val="53CED1"/>
-                </a:solidFill>
-              </a:defRPr>
-            </a:pPr>
-            <a:r>
-              <a:t>— Автор цитаты</a:t>
-            </a:r>
-          </a:p>
-        </p:txBody>
-      </p:sp>
-    </p:spTree>
-  </p:cSld>
-  <p:clrMapOvr>
-    <a:masterClrMapping/>
-  </p:clrMapOvr>
-</p:sld>
-</file>
-
-<file path=ppt/slides/slide6.xml><?xml version="1.0" encoding="utf-8"?>
-<p:sld xmlns:a="http://schemas.openxmlformats.org/drawingml/2006/main" xmlns:p="http://schemas.openxmlformats.org/presentationml/2006/main" xmlns:r="http://schemas.openxmlformats.org/officeDocument/2006/relationships">
-  <p:cSld>
-    <p:bg>
-      <p:bgPr>
-        <a:gradFill rotWithShape="1">
-          <a:gsLst>
-            <a:gs pos="0">
-              <a:srgbClr val="0F0C29"/>
-            </a:gs>
-            <a:gs pos="100000">
-              <a:srgbClr val="302B63"/>
-            </a:gs>
-          </a:gsLst>
-          <a:lin scaled="0"/>
-        </a:gradFill>
-        <a:effectLst/>
-      </p:bgPr>
-    </p:bg>
-    <p:spTree>
-      <p:nvGrpSpPr>
-        <p:cNvPr id="1" name=""/>
-        <p:cNvGrpSpPr/>
-        <p:nvPr/>
-      </p:nvGrpSpPr>
-      <p:grpSpPr/>
-      <p:sp>
-        <p:nvSpPr>
-          <p:cNvPr id="2" name="Oval 1"/>
-          <p:cNvSpPr/>
-          <p:nvPr/>
-        </p:nvSpPr>
-        <p:spPr>
-          <a:xfrm>
-            <a:off x="6858000" y="4114800"/>
-            <a:ext cx="3200400" cy="3200400"/>
-          </a:xfrm>
-          <a:prstGeom prst="ellipse">
-            <a:avLst/>
-          </a:prstGeom>
-          <a:solidFill>
-            <a:srgbClr val="0F8B8D"/>
-          </a:solidFill>
-          <a:ln>
-            <a:noFill/>
-          </a:ln>
-        </p:spPr>
-        <p:style>
-          <a:lnRef idx="1">
-            <a:schemeClr val="accent1"/>
-          </a:lnRef>
-          <a:fillRef idx="3">
-            <a:schemeClr val="accent1"/>
-          </a:fillRef>
-          <a:effectRef idx="2">
-            <a:schemeClr val="accent1"/>
-          </a:effectRef>
-          <a:fontRef idx="minor">
-            <a:schemeClr val="lt1"/>
-          </a:fontRef>
-        </p:style>
-        <p:txBody>
-          <a:bodyPr rtlCol="0" anchor="ctr"/>
-          <a:lstStyle/>
-          <a:p>
-            <a:pPr algn="ctr"/>
-          </a:p>
-        </p:txBody>
-      </p:sp>
-      <p:sp>
-        <p:nvSpPr>
-          <p:cNvPr id="3" name="TextBox 2"/>
-          <p:cNvSpPr txBox="1"/>
-          <p:nvPr/>
-        </p:nvSpPr>
-        <p:spPr>
-          <a:xfrm>
-            <a:off x="1371600" y="2286000"/>
-            <a:ext cx="6400800" cy="1371600"/>
-          </a:xfrm>
-          <a:prstGeom prst="rect">
-            <a:avLst/>
-          </a:prstGeom>
-          <a:noFill/>
-        </p:spPr>
-        <p:txBody>
-          <a:bodyPr wrap="square">
-            <a:spAutoFit/>
-          </a:bodyPr>
-          <a:lstStyle/>
-          <a:p>
-            <a:pPr>
-              <a:defRPr sz="3600" b="1">
-                <a:solidFill>
-                  <a:srgbClr val="FFFFFF"/>
-                </a:solidFill>
-              </a:defRPr>
-            </a:pPr>
-            <a:r>
-              <a:t>СПАСИБО ЗА ВНИМАНИЕ</a:t>
-            </a:r>
-          </a:p>
-        </p:txBody>
-      </p:sp>
-      <p:sp>
-        <p:nvSpPr>
-          <p:cNvPr id="4" name="TextBox 3"/>
-          <p:cNvSpPr txBox="1"/>
-          <p:nvPr/>
-        </p:nvSpPr>
-        <p:spPr>
-          <a:xfrm>
-            <a:off x="1371600" y="3840480"/>
-            <a:ext cx="5486400" cy="1371600"/>
-          </a:xfrm>
-          <a:prstGeom prst="rect">
-            <a:avLst/>
-          </a:prstGeom>
-          <a:noFill/>
-        </p:spPr>
-        <p:txBody>
-          <a:bodyPr wrap="square">
-            <a:spAutoFit/>
-          </a:bodyPr>
-          <a:lstStyle/>
-          <a:p>
-            <a:pPr>
-              <a:defRPr sz="2000">
-                <a:solidFill>
-                  <a:srgbClr val="53CED1"/>
-                </a:solidFill>
-              </a:defRPr>
-            </a:pPr>
-            <a:r>
-              <a:t>Вопросы?</a:t>
-            </a:r>
-          </a:p>
-          <a:p>
-            <a:br/>
-            <a:pPr>
-              <a:defRPr sz="1400">
-                <a:solidFill>
-                  <a:srgbClr val="E8E8E8"/>
-                </a:solidFill>
-              </a:defRPr>
-            </a:pPr>
-            <a:r>
-              <a:t>email@example.com</a:t>
+              <a:t>Студент • Тверской филиал</a:t>
             </a:r>
           </a:p>
         </p:txBody>
